--- a/slides/01-tong-quan-giao-tiep.en.pptx
+++ b/slides/01-tong-quan-giao-tiep.en.pptx
@@ -2984,7 +2984,7 @@
       </p:sp>
       <p:pic>
         <p:nvPicPr>
-          <p:cNvPr id="3" name="Image 0" descr="assets/logo_tron.png">    </p:cNvPr>
+          <p:cNvPr id="3" name="Image 0" descr="/home/user/comdraft/assets/img/dau-huong.png">    </p:cNvPr>
           <p:cNvPicPr>
             <a:picLocks noChangeAspect="1"/>
           </p:cNvPicPr>
@@ -3010,7 +3010,7 @@
       </p:pic>
       <p:pic>
         <p:nvPicPr>
-          <p:cNvPr id="4" name="Image 1" descr="assets/logo_ngang.png">    </p:cNvPr>
+          <p:cNvPr id="4" name="Image 1" descr="/home/user/comdraft/assets/img/lockup-huong.png">    </p:cNvPr>
           <p:cNvPicPr>
             <a:picLocks noChangeAspect="1"/>
           </p:cNvPicPr>
@@ -3343,7 +3343,7 @@
       </p:grpSpPr>
       <p:pic>
         <p:nvPicPr>
-          <p:cNvPr id="2" name="Image 0" descr="assets/logo_tron.png">    </p:cNvPr>
+          <p:cNvPr id="2" name="Image 0" descr="/home/user/comdraft/assets/img/dau-huong.png">    </p:cNvPr>
           <p:cNvPicPr>
             <a:picLocks noChangeAspect="1"/>
           </p:cNvPicPr>
@@ -4750,7 +4750,7 @@
       </p:grpSpPr>
       <p:pic>
         <p:nvPicPr>
-          <p:cNvPr id="2" name="Image 0" descr="assets/logo_tron.png">    </p:cNvPr>
+          <p:cNvPr id="2" name="Image 0" descr="/home/user/comdraft/assets/img/dau-huong.png">    </p:cNvPr>
           <p:cNvPicPr>
             <a:picLocks noChangeAspect="1"/>
           </p:cNvPicPr>
@@ -5405,7 +5405,7 @@
       </p:grpSpPr>
       <p:pic>
         <p:nvPicPr>
-          <p:cNvPr id="2" name="Image 0" descr="assets/logo_tron.png">    </p:cNvPr>
+          <p:cNvPr id="2" name="Image 0" descr="/home/user/comdraft/assets/img/dau-huong.png">    </p:cNvPr>
           <p:cNvPicPr>
             <a:picLocks noChangeAspect="1"/>
           </p:cNvPicPr>
@@ -5739,7 +5739,7 @@
       </p:grpSpPr>
       <p:pic>
         <p:nvPicPr>
-          <p:cNvPr id="2" name="Image 0" descr="assets/logo_tron.png">    </p:cNvPr>
+          <p:cNvPr id="2" name="Image 0" descr="/home/user/comdraft/assets/img/dau-huong.png">    </p:cNvPr>
           <p:cNvPicPr>
             <a:picLocks noChangeAspect="1"/>
           </p:cNvPicPr>
@@ -6594,7 +6594,7 @@
       </p:grpSpPr>
       <p:pic>
         <p:nvPicPr>
-          <p:cNvPr id="2" name="Image 0" descr="assets/logo_tron.png">    </p:cNvPr>
+          <p:cNvPr id="2" name="Image 0" descr="/home/user/comdraft/assets/img/dau-huong.png">    </p:cNvPr>
           <p:cNvPicPr>
             <a:picLocks noChangeAspect="1"/>
           </p:cNvPicPr>
@@ -7325,7 +7325,7 @@
       </p:grpSpPr>
       <p:pic>
         <p:nvPicPr>
-          <p:cNvPr id="2" name="Image 0" descr="assets/logo_tron.png">    </p:cNvPr>
+          <p:cNvPr id="2" name="Image 0" descr="/home/user/comdraft/assets/img/dau-huong.png">    </p:cNvPr>
           <p:cNvPicPr>
             <a:picLocks noChangeAspect="1"/>
           </p:cNvPicPr>
@@ -7861,7 +7861,7 @@
       </p:grpSpPr>
       <p:pic>
         <p:nvPicPr>
-          <p:cNvPr id="2" name="Image 0" descr="assets/logo_tron.png">    </p:cNvPr>
+          <p:cNvPr id="2" name="Image 0" descr="/home/user/comdraft/assets/img/dau-huong.png">    </p:cNvPr>
           <p:cNvPicPr>
             <a:picLocks noChangeAspect="1"/>
           </p:cNvPicPr>
@@ -8628,7 +8628,7 @@
       </p:grpSpPr>
       <p:pic>
         <p:nvPicPr>
-          <p:cNvPr id="2" name="Image 0" descr="assets/logo_tron.png">    </p:cNvPr>
+          <p:cNvPr id="2" name="Image 0" descr="/home/user/comdraft/assets/img/dau-huong.png">    </p:cNvPr>
           <p:cNvPicPr>
             <a:picLocks noChangeAspect="1"/>
           </p:cNvPicPr>
@@ -9164,7 +9164,7 @@
       </p:grpSpPr>
       <p:pic>
         <p:nvPicPr>
-          <p:cNvPr id="2" name="Image 0" descr="assets/logo_tron.png">    </p:cNvPr>
+          <p:cNvPr id="2" name="Image 0" descr="/home/user/comdraft/assets/img/dau-huong.png">    </p:cNvPr>
           <p:cNvPicPr>
             <a:picLocks noChangeAspect="1"/>
           </p:cNvPicPr>
@@ -9700,7 +9700,7 @@
       </p:grpSpPr>
       <p:pic>
         <p:nvPicPr>
-          <p:cNvPr id="2" name="Image 0" descr="assets/logo_tron.png">    </p:cNvPr>
+          <p:cNvPr id="2" name="Image 0" descr="/home/user/comdraft/assets/img/dau-huong.png">    </p:cNvPr>
           <p:cNvPicPr>
             <a:picLocks noChangeAspect="1"/>
           </p:cNvPicPr>
@@ -10439,7 +10439,7 @@
       </p:grpSpPr>
       <p:pic>
         <p:nvPicPr>
-          <p:cNvPr id="2" name="Image 0" descr="assets/logo_tron.png">    </p:cNvPr>
+          <p:cNvPr id="2" name="Image 0" descr="/home/user/comdraft/assets/img/dau-huong.png">    </p:cNvPr>
           <p:cNvPicPr>
             <a:picLocks noChangeAspect="1"/>
           </p:cNvPicPr>
@@ -11615,7 +11615,7 @@
       </p:grpSpPr>
       <p:pic>
         <p:nvPicPr>
-          <p:cNvPr id="2" name="Image 0" descr="assets/logo_tron.png">    </p:cNvPr>
+          <p:cNvPr id="2" name="Image 0" descr="/home/user/comdraft/assets/img/dau-huong.png">    </p:cNvPr>
           <p:cNvPicPr>
             <a:picLocks noChangeAspect="1"/>
           </p:cNvPicPr>
@@ -12151,7 +12151,7 @@
       </p:grpSpPr>
       <p:pic>
         <p:nvPicPr>
-          <p:cNvPr id="2" name="Image 0" descr="assets/logo_tron.png">    </p:cNvPr>
+          <p:cNvPr id="2" name="Image 0" descr="/home/user/comdraft/assets/img/dau-huong.png">    </p:cNvPr>
           <p:cNvPicPr>
             <a:picLocks noChangeAspect="1"/>
           </p:cNvPicPr>
@@ -12774,7 +12774,7 @@
       </p:grpSpPr>
       <p:pic>
         <p:nvPicPr>
-          <p:cNvPr id="2" name="Image 0" descr="assets/logo_tron.png">    </p:cNvPr>
+          <p:cNvPr id="2" name="Image 0" descr="/home/user/comdraft/assets/img/dau-huong.png">    </p:cNvPr>
           <p:cNvPicPr>
             <a:picLocks noChangeAspect="1"/>
           </p:cNvPicPr>
@@ -13108,7 +13108,7 @@
       </p:grpSpPr>
       <p:pic>
         <p:nvPicPr>
-          <p:cNvPr id="2" name="Image 0" descr="assets/logo_tron.png">    </p:cNvPr>
+          <p:cNvPr id="2" name="Image 0" descr="/home/user/comdraft/assets/img/dau-huong.png">    </p:cNvPr>
           <p:cNvPicPr>
             <a:picLocks noChangeAspect="1"/>
           </p:cNvPicPr>
